--- a/slides/block2.pptx
+++ b/slides/block2.pptx
@@ -524,7 +524,7 @@
           <a:lstStyle/>
           <a:p>
             <a:r>
-              <a:t>Block 1 taught them to classify. This block is about what a number is worth. Say plainly at the start: an ICER on its own is inert. It becomes a decision only when you set it against something, and this session is about where that something comes from, and how contested it is.</a:t>
+              <a:t>Sessions 2 to 5 built an ICER and then ranked options with it. This session is about what that number is worth. Say plainly at the start: an ICER on its own is inert. It becomes a decision only when you set it against something, and this session is about where that something comes from, and how contested it is.</a:t>
             </a:r>
           </a:p>
         </p:txBody>
@@ -664,7 +664,7 @@
           <a:lstStyle/>
           <a:p>
             <a:r>
-              <a:t>This pays off Block 1's QALY versus DALY warning. Seventy per cent of the table is in one currency of health and thirty per cent in another, and a quarter of the entries are undiscounted. You cannot rank those against each other honestly. Press the completeness point too: the missing rows are the real problem, and they are missing for reasons that correlate with who has research funding.</a:t>
+              <a:t>This pays off the QALY versus DALY warning from Sessions 2 and 5. Seventy per cent of the table is in one currency of health and thirty per cent in another, and a quarter of the entries are undiscounted. You cannot rank those against each other honestly. Press the completeness point too: the missing rows are the real problem, and they are missing for reasons that correlate with who has research funding.</a:t>
             </a:r>
           </a:p>
         </p:txBody>
@@ -1364,7 +1364,7 @@
           <a:lstStyle/>
           <a:p>
             <a:r>
-              <a:t>Five minutes. Two things to have them try. Park an intervention just below the line, then drag λ down to a plausible supply-side value and watch it become unaffordable. That is the Woods argument made physical. Then the south-west quadrant, where the decision rule reverses. Disinvestment lives there, and almost nobody looks for it.</a:t>
+              <a:t>Five minutes. They met this widget in Session 5, when they were ranking strategies; now λ itself is the thing that moves. Two things to have them try. Park an intervention just below the line, then drag λ down to a plausible supply-side value and watch it become unaffordable. That is the Woods argument made physical. Then the south-west quadrant, where the decision rule reverses. Disinvestment lives there, and almost nobody looks for it.</a:t>
             </a:r>
           </a:p>
         </p:txBody>
@@ -1574,7 +1574,7 @@
           <a:lstStyle/>
           <a:p>
             <a:r>
-              <a:t>Set that pre-read explicitly. It is the paper Block 3A uses to teach framing, and they get far more out of it having already looked.</a:t>
+              <a:t>Set that pre-read explicitly, it makes the modelling session concrete rather than abstract. If a group's paper has no model diagram, that is itself worth reporting back.</a:t>
             </a:r>
           </a:p>
         </p:txBody>
@@ -1644,7 +1644,7 @@
           <a:lstStyle/>
           <a:p>
             <a:r>
-              <a:t>Take a show of hands: good value, bad value, do not know. Then point out that "do not know" is the only defensible answer, because the question is incomplete. A ratio needs something on the other side of the inequality.</a:t>
+              <a:t>Take a show of hands on the ₹54,881: good value, bad value, do not know. Then point out that "do not know" was the only defensible answer all morning, because the question was incomplete. A ratio needs something on the other side of the inequality, and this session is where that something comes from. They have now earned the question: they built an ICER in Session 5 and borrowed a threshold to use it.</a:t>
             </a:r>
           </a:p>
         </p:txBody>
@@ -2064,7 +2064,7 @@
           <a:lstStyle/>
           <a:p>
             <a:r>
-              <a:t>The satisfying moment of the workshop: Block 1's cliff-hanger resolves. Then immediately complicate it. Decisions get made on the evidence available, not the evidence you wish existed.</a:t>
+              <a:t>The satisfying moment of the workshop: the question parked since Session 2 resolves, and the threshold borrowed in Session 5 acquires a source. Then immediately complicate it. Decisions get made on the evidence available, not the evidence you wish existed.</a:t>
             </a:r>
           </a:p>
         </p:txBody>
@@ -5108,7 +5108,7 @@
                 </a:solidFill>
                 <a:latin typeface="Arial"/>
               </a:rPr>
-              <a:t>ECONOMIC EVALUATION IN HEALTH · FACULTY WORKSHOP · SESSION 3</a:t>
+              <a:t>ECONOMIC EVALUATION IN HEALTH · FACULTY WORKSHOP · SESSION 6</a:t>
             </a:r>
           </a:p>
         </p:txBody>
@@ -12289,7 +12289,7 @@
                 </a:solidFill>
                 <a:latin typeface="Arial"/>
               </a:rPr>
-              <a:t>By the end of this block</a:t>
+              <a:t>By the end of this session</a:t>
             </a:r>
           </a:p>
         </p:txBody>
@@ -14075,7 +14075,7 @@
                 </a:solidFill>
                 <a:latin typeface="Arial"/>
               </a:rPr>
-              <a:t>FACULTY WORKSHOP · SESSION 5 · DRUMMOND 4TH ED., CHAPTER 4</a:t>
+              <a:t>FACULTY WORKSHOP · SESSION 7 · MODELLING</a:t>
             </a:r>
           </a:p>
         </p:txBody>
@@ -14118,7 +14118,7 @@
                 </a:solidFill>
                 <a:latin typeface="Arial"/>
               </a:rPr>
-              <a:t>Principles of</a:t>
+              <a:t>Where the numbers</a:t>
             </a:r>
           </a:p>
           <a:p>
@@ -14138,7 +14138,7 @@
                 </a:solidFill>
                 <a:latin typeface="Arial"/>
               </a:rPr>
-              <a:t>economic evaluation</a:t>
+              <a:t>came from</a:t>
             </a:r>
           </a:p>
         </p:txBody>
@@ -14152,7 +14152,7 @@
         <p:spPr>
           <a:xfrm>
             <a:off x="914400" y="2207808"/>
-            <a:ext cx="10363200" cy="2056209"/>
+            <a:ext cx="10363200" cy="1542157"/>
           </a:xfrm>
           <a:prstGeom prst="rect">
             <a:avLst/>
@@ -14181,7 +14181,7 @@
                 </a:solidFill>
                 <a:latin typeface="Arial"/>
               </a:rPr>
-              <a:t>How the ICER is actually built. The decision problem, comparators, perspective, time horizon, costing, QALYs, discounting, dominance. Then why that ICER is only a point estimate.</a:t>
+              <a:t>Every ICER today arrived already calculated, over a lifetime nobody observed. The next session is the machinery that produces them: decision trees and Markov models.</a:t>
             </a:r>
           </a:p>
         </p:txBody>
@@ -14194,7 +14194,7 @@
         </p:nvSpPr>
         <p:spPr>
           <a:xfrm>
-            <a:off x="914400" y="4543219"/>
+            <a:off x="914400" y="4029167"/>
             <a:ext cx="10363200" cy="781645"/>
           </a:xfrm>
           <a:prstGeom prst="rect">
@@ -14224,7 +14224,7 @@
                 </a:solidFill>
                 <a:latin typeface="Arial"/>
               </a:rPr>
-              <a:t>Before Block 3: skim the methods of Chauhan 2020 and note its perspective, time horizon and discount rate.</a:t>
+              <a:t>Before the next session: find the figure in your group's paper that shows its model structure. Most papers have one.</a:t>
             </a:r>
           </a:p>
         </p:txBody>
@@ -14329,7 +14329,7 @@
                 </a:solidFill>
                 <a:latin typeface="Arial"/>
               </a:rPr>
-              <a:t>Where Block 1 left off</a:t>
+              <a:t>The number we borrowed</a:t>
             </a:r>
           </a:p>
         </p:txBody>
@@ -14372,7 +14372,7 @@
                 </a:solidFill>
                 <a:latin typeface="Arial"/>
               </a:rPr>
-              <a:t>Screening with VIA every five years came out at </a:t>
+              <a:t>In the last session you ranked strategies against </a:t>
             </a:r>
             <a:r>
               <a:rPr sz="3000" b="1" i="0">
@@ -14381,7 +14381,16 @@
                 </a:solidFill>
                 <a:latin typeface="Arial"/>
               </a:rPr>
-              <a:t>₹54,881 per QALY gained</a:t>
+              <a:t>λ</a:t>
+            </a:r>
+            <a:r>
+              <a:rPr sz="3000" b="1" i="0">
+                <a:solidFill>
+                  <a:srgbClr val="10141A"/>
+                </a:solidFill>
+                <a:latin typeface="Arial"/>
+              </a:rPr>
+              <a:t> ≈ ₹2,12,307 per QALY</a:t>
             </a:r>
             <a:r>
               <a:rPr sz="3000" b="0" i="0">
@@ -14390,7 +14399,7 @@
                 </a:solidFill>
                 <a:latin typeface="Arial"/>
               </a:rPr>
-              <a:t>.</a:t>
+              <a:t>, and took that number on trust.</a:t>
             </a:r>
           </a:p>
         </p:txBody>
@@ -14519,7 +14528,7 @@
                 </a:solidFill>
                 <a:latin typeface="Arial"/>
               </a:rPr>
-              <a:t>Is that good value?</a:t>
+              <a:t>Where does it come from, and should you believe it?</a:t>
             </a:r>
           </a:p>
         </p:txBody>
@@ -14533,7 +14542,7 @@
         <p:spPr>
           <a:xfrm>
             <a:off x="552450" y="3179358"/>
-            <a:ext cx="11087100" cy="1028105"/>
+            <a:ext cx="11087100" cy="1542157"/>
           </a:xfrm>
           <a:prstGeom prst="rect">
             <a:avLst/>
@@ -14562,7 +14571,7 @@
                 </a:solidFill>
                 <a:latin typeface="Arial"/>
               </a:rPr>
-              <a:t>Nobody in this room can answer that yet. Neither could the literature, in India, until very recently.</a:t>
+              <a:t>The same gap sits under this morning's ₹54,881 per QALY for VIA screening. Is that good value? Nobody in this room could say, and neither could the literature, in India, until very recently.</a:t>
             </a:r>
           </a:p>
         </p:txBody>
@@ -14575,7 +14584,7 @@
         </p:nvSpPr>
         <p:spPr>
           <a:xfrm>
-            <a:off x="552450" y="4417814"/>
+            <a:off x="552450" y="4931866"/>
             <a:ext cx="11087100" cy="9525"/>
           </a:xfrm>
           <a:prstGeom prst="rect">
@@ -14619,7 +14628,7 @@
         </p:nvSpPr>
         <p:spPr>
           <a:xfrm>
-            <a:off x="552450" y="4486635"/>
+            <a:off x="552450" y="5000687"/>
             <a:ext cx="11087100" cy="258098"/>
           </a:xfrm>
           <a:prstGeom prst="rect">
@@ -14649,7 +14658,7 @@
                 </a:solidFill>
                 <a:latin typeface="Arial"/>
               </a:rPr>
-              <a:t>Chauhan, Prinja et al., </a:t>
+              <a:t>ICER from Chauhan, Prinja et al., </a:t>
             </a:r>
             <a:r>
               <a:rPr sz="1400" b="0" i="1">
@@ -14667,7 +14676,25 @@
                 </a:solidFill>
                 <a:latin typeface="Arial"/>
               </a:rPr>
-              <a:t>, 2020.</a:t>
+              <a:t>, 2020. Threshold from Chugh et al., </a:t>
+            </a:r>
+            <a:r>
+              <a:rPr sz="1400" b="0" i="1">
+                <a:solidFill>
+                  <a:srgbClr val="75808D"/>
+                </a:solidFill>
+                <a:latin typeface="Arial"/>
+              </a:rPr>
+              <a:t>Value in Health</a:t>
+            </a:r>
+            <a:r>
+              <a:rPr sz="1400" b="0" i="0">
+                <a:solidFill>
+                  <a:srgbClr val="75808D"/>
+                </a:solidFill>
+                <a:latin typeface="Arial"/>
+              </a:rPr>
+              <a:t>, 2026.</a:t>
             </a:r>
           </a:p>
         </p:txBody>
@@ -18109,6 +18136,9 @@
                           <a:solidFill>
                             <a:srgbClr val="FFFFFF"/>
                           </a:solidFill>
+                          <a:highlight>
+                            <a:srgbClr val="17683C"/>
+                          </a:highlight>
                           <a:latin typeface="Arial"/>
                         </a:rPr>
                         <a:t>well below</a:t>
@@ -18188,6 +18218,9 @@
                           <a:solidFill>
                             <a:srgbClr val="FFFFFF"/>
                           </a:solidFill>
+                          <a:highlight>
+                            <a:srgbClr val="17683C"/>
+                          </a:highlight>
                           <a:latin typeface="Arial"/>
                         </a:rPr>
                         <a:t>below</a:t>

--- a/slides/block2.pptx
+++ b/slides/block2.pptx
@@ -12782,7 +12782,7 @@
         <p:spPr>
           <a:xfrm>
             <a:off x="552450" y="1162050"/>
-            <a:ext cx="11106150" cy="4114800"/>
+            <a:ext cx="11106150" cy="3733800"/>
           </a:xfrm>
           <a:prstGeom prst="rect">
             <a:avLst/>
@@ -12797,7 +12797,7 @@
         </p:nvSpPr>
         <p:spPr>
           <a:xfrm>
-            <a:off x="552450" y="5316828"/>
+            <a:off x="552450" y="4935828"/>
             <a:ext cx="11087100" cy="781645"/>
           </a:xfrm>
           <a:prstGeom prst="rect">
@@ -12858,7 +12858,7 @@
         </p:nvSpPr>
         <p:spPr>
           <a:xfrm>
-            <a:off x="552450" y="6258074"/>
+            <a:off x="552450" y="5950595"/>
             <a:ext cx="11087100" cy="9525"/>
           </a:xfrm>
           <a:prstGeom prst="rect">
@@ -12902,8 +12902,8 @@
         </p:nvSpPr>
         <p:spPr>
           <a:xfrm>
-            <a:off x="552450" y="6326894"/>
-            <a:ext cx="11087100" cy="258098"/>
+            <a:off x="552450" y="6196551"/>
+            <a:ext cx="10420350" cy="248692"/>
           </a:xfrm>
           <a:prstGeom prst="rect">
             <a:avLst/>
@@ -12946,6 +12946,30 @@
           </a:p>
         </p:txBody>
       </p:sp>
+      <p:pic>
+        <p:nvPicPr>
+          <p:cNvPr id="8" name="Picture 7" descr="block2-20-1.png"/>
+          <p:cNvPicPr>
+            <a:picLocks noChangeAspect="1"/>
+          </p:cNvPicPr>
+          <p:nvPr/>
+        </p:nvPicPr>
+        <p:blipFill>
+          <a:blip r:embed="rId3"/>
+          <a:stretch>
+            <a:fillRect/>
+          </a:stretch>
+        </p:blipFill>
+        <p:spPr>
+          <a:xfrm>
+            <a:off x="11144250" y="6137672"/>
+            <a:ext cx="495300" cy="495300"/>
+          </a:xfrm>
+          <a:prstGeom prst="rect">
+            <a:avLst/>
+          </a:prstGeom>
+        </p:spPr>
+      </p:pic>
     </p:spTree>
   </p:cSld>
   <p:clrMapOvr>
